--- a/site/lectures/week03-session1.pptx
+++ b/site/lectures/week03-session1.pptx
@@ -7701,8 +7701,8 @@
         </p:blipFill>
         <p:spPr>
           <a:xfrm>
-            <a:off x="548640" y="1550428"/>
-            <a:ext cx="6379289" cy="3870683"/>
+            <a:off x="548640" y="1424467"/>
+            <a:ext cx="6379289" cy="4122603"/>
           </a:xfrm>
           <a:prstGeom prst="rect">
             <a:avLst/>
